--- a/classes/parte-1-machine-learning-clasico/075-regresion-logistica-binaria-y-softmax/clase-075-regresion-logistica-binaria-y-softmax-presentacion.pptx
+++ b/classes/parte-1-machine-learning-clasico/075-regresion-logistica-binaria-y-softmax/clase-075-regresion-logistica-binaria-y-softmax-presentacion.pptx
@@ -4933,7 +4933,7 @@
                 </a:solidFill>
                 <a:latin typeface="Segoe UI"/>
               </a:rPr>
-              <a:t>Primer bloque ejecutable del notebook.</a:t>
+              <a:t>Entrenamos LogisticRegression (escalada) y reportamos accuracy, log-loss y matriz de confusión. Interpretamos los coeficientes de mayor peso como odds-ratio $\exp(w)$.</a:t>
             </a:r>
           </a:p>
         </p:txBody>
@@ -5020,7 +5020,387 @@
                 </a:solidFill>
                 <a:latin typeface="Courier New"/>
               </a:rPr>
-              <a:t># Imports y configuración inicial</a:t>
+              <a:t>import numpy as np</a:t>
+            </a:r>
+          </a:p>
+          <a:p>
+            <a:pPr>
+              <a:defRPr sz="1200" b="0">
+                <a:solidFill>
+                  <a:srgbClr val="F8FAFC"/>
+                </a:solidFill>
+                <a:latin typeface="Courier New"/>
+              </a:defRPr>
+            </a:pPr>
+            <a:r>
+              <a:rPr sz="1200" b="0">
+                <a:solidFill>
+                  <a:srgbClr val="F8FAFC"/>
+                </a:solidFill>
+                <a:latin typeface="Courier New"/>
+              </a:rPr>
+              <a:t>import matplotlib.pyplot as plt</a:t>
+            </a:r>
+          </a:p>
+          <a:p>
+            <a:pPr>
+              <a:defRPr sz="1200" b="0">
+                <a:solidFill>
+                  <a:srgbClr val="F8FAFC"/>
+                </a:solidFill>
+                <a:latin typeface="Courier New"/>
+              </a:defRPr>
+            </a:pPr>
+            <a:r>
+              <a:rPr sz="1200" b="0">
+                <a:solidFill>
+                  <a:srgbClr val="F8FAFC"/>
+                </a:solidFill>
+                <a:latin typeface="Courier New"/>
+              </a:rPr>
+              <a:t>from sklearn.datasets import load_breast_cancer</a:t>
+            </a:r>
+          </a:p>
+          <a:p>
+            <a:pPr>
+              <a:defRPr sz="1200" b="0">
+                <a:solidFill>
+                  <a:srgbClr val="F8FAFC"/>
+                </a:solidFill>
+                <a:latin typeface="Courier New"/>
+              </a:defRPr>
+            </a:pPr>
+            <a:r>
+              <a:rPr sz="1200" b="0">
+                <a:solidFill>
+                  <a:srgbClr val="F8FAFC"/>
+                </a:solidFill>
+                <a:latin typeface="Courier New"/>
+              </a:rPr>
+              <a:t>from sklearn.model_selection import train_test_split</a:t>
+            </a:r>
+          </a:p>
+          <a:p>
+            <a:pPr>
+              <a:defRPr sz="1200" b="0">
+                <a:solidFill>
+                  <a:srgbClr val="F8FAFC"/>
+                </a:solidFill>
+                <a:latin typeface="Courier New"/>
+              </a:defRPr>
+            </a:pPr>
+            <a:r>
+              <a:rPr sz="1200" b="0">
+                <a:solidFill>
+                  <a:srgbClr val="F8FAFC"/>
+                </a:solidFill>
+                <a:latin typeface="Courier New"/>
+              </a:rPr>
+              <a:t>from sklearn.preprocessing import StandardScaler</a:t>
+            </a:r>
+          </a:p>
+          <a:p>
+            <a:pPr>
+              <a:defRPr sz="1200" b="0">
+                <a:solidFill>
+                  <a:srgbClr val="F8FAFC"/>
+                </a:solidFill>
+                <a:latin typeface="Courier New"/>
+              </a:defRPr>
+            </a:pPr>
+            <a:r>
+              <a:rPr sz="1200" b="0">
+                <a:solidFill>
+                  <a:srgbClr val="F8FAFC"/>
+                </a:solidFill>
+                <a:latin typeface="Courier New"/>
+              </a:rPr>
+              <a:t>from sklearn.linear_model import LogisticRegression</a:t>
+            </a:r>
+          </a:p>
+          <a:p>
+            <a:pPr>
+              <a:defRPr sz="1200" b="0">
+                <a:solidFill>
+                  <a:srgbClr val="F8FAFC"/>
+                </a:solidFill>
+                <a:latin typeface="Courier New"/>
+              </a:defRPr>
+            </a:pPr>
+            <a:r>
+              <a:rPr sz="1200" b="0">
+                <a:solidFill>
+                  <a:srgbClr val="F8FAFC"/>
+                </a:solidFill>
+                <a:latin typeface="Courier New"/>
+              </a:rPr>
+              <a:t>from sklearn.pipeline import make_pipeline</a:t>
+            </a:r>
+          </a:p>
+          <a:p>
+            <a:pPr>
+              <a:defRPr sz="1200" b="0">
+                <a:solidFill>
+                  <a:srgbClr val="F8FAFC"/>
+                </a:solidFill>
+                <a:latin typeface="Courier New"/>
+              </a:defRPr>
+            </a:pPr>
+            <a:r>
+              <a:rPr sz="1200" b="0">
+                <a:solidFill>
+                  <a:srgbClr val="F8FAFC"/>
+                </a:solidFill>
+                <a:latin typeface="Courier New"/>
+              </a:rPr>
+              <a:t>from sklearn.metrics import accuracy_score, log_loss, confusion_matrix</a:t>
+            </a:r>
+          </a:p>
+          <a:p>
+            <a:pPr>
+              <a:defRPr sz="1200" b="0">
+                <a:solidFill>
+                  <a:srgbClr val="F8FAFC"/>
+                </a:solidFill>
+                <a:latin typeface="Courier New"/>
+              </a:defRPr>
+            </a:pPr>
+            <a:r>
+              <a:rPr sz="1200" b="0">
+                <a:solidFill>
+                  <a:srgbClr val="F8FAFC"/>
+                </a:solidFill>
+                <a:latin typeface="Courier New"/>
+              </a:rPr>
+              <a:t> </a:t>
+            </a:r>
+          </a:p>
+          <a:p>
+            <a:pPr>
+              <a:defRPr sz="1200" b="0">
+                <a:solidFill>
+                  <a:srgbClr val="F8FAFC"/>
+                </a:solidFill>
+                <a:latin typeface="Courier New"/>
+              </a:defRPr>
+            </a:pPr>
+            <a:r>
+              <a:rPr sz="1200" b="0">
+                <a:solidFill>
+                  <a:srgbClr val="F8FAFC"/>
+                </a:solidFill>
+                <a:latin typeface="Courier New"/>
+              </a:rPr>
+              <a:t>data = load_breast_cancer()</a:t>
+            </a:r>
+          </a:p>
+          <a:p>
+            <a:pPr>
+              <a:defRPr sz="1200" b="0">
+                <a:solidFill>
+                  <a:srgbClr val="F8FAFC"/>
+                </a:solidFill>
+                <a:latin typeface="Courier New"/>
+              </a:defRPr>
+            </a:pPr>
+            <a:r>
+              <a:rPr sz="1200" b="0">
+                <a:solidFill>
+                  <a:srgbClr val="F8FAFC"/>
+                </a:solidFill>
+                <a:latin typeface="Courier New"/>
+              </a:rPr>
+              <a:t>Xc, yc = data.data, data.target</a:t>
+            </a:r>
+          </a:p>
+          <a:p>
+            <a:pPr>
+              <a:defRPr sz="1200" b="0">
+                <a:solidFill>
+                  <a:srgbClr val="F8FAFC"/>
+                </a:solidFill>
+                <a:latin typeface="Courier New"/>
+              </a:defRPr>
+            </a:pPr>
+            <a:r>
+              <a:rPr sz="1200" b="0">
+                <a:solidFill>
+                  <a:srgbClr val="F8FAFC"/>
+                </a:solidFill>
+                <a:latin typeface="Courier New"/>
+              </a:rPr>
+              <a:t>Xtr, Xte, ytr, yte = train_test_split(Xc, yc, test_size=0.2, random_state=42, stratify=yc)</a:t>
+            </a:r>
+          </a:p>
+          <a:p>
+            <a:pPr>
+              <a:defRPr sz="1200" b="0">
+                <a:solidFill>
+                  <a:srgbClr val="F8FAFC"/>
+                </a:solidFill>
+                <a:latin typeface="Courier New"/>
+              </a:defRPr>
+            </a:pPr>
+            <a:r>
+              <a:rPr sz="1200" b="0">
+                <a:solidFill>
+                  <a:srgbClr val="F8FAFC"/>
+                </a:solidFill>
+                <a:latin typeface="Courier New"/>
+              </a:rPr>
+              <a:t>clf = make_pipeline(StandardScaler(), LogisticRegression(max_iter=1000)).fit(Xtr, ytr)</a:t>
+            </a:r>
+          </a:p>
+          <a:p>
+            <a:pPr>
+              <a:defRPr sz="1200" b="0">
+                <a:solidFill>
+                  <a:srgbClr val="F8FAFC"/>
+                </a:solidFill>
+                <a:latin typeface="Courier New"/>
+              </a:defRPr>
+            </a:pPr>
+            <a:r>
+              <a:rPr sz="1200" b="0">
+                <a:solidFill>
+                  <a:srgbClr val="F8FAFC"/>
+                </a:solidFill>
+                <a:latin typeface="Courier New"/>
+              </a:rPr>
+              <a:t>proba = clf.predict_proba(Xte)[:, 1]</a:t>
+            </a:r>
+          </a:p>
+          <a:p>
+            <a:pPr>
+              <a:defRPr sz="1200" b="0">
+                <a:solidFill>
+                  <a:srgbClr val="F8FAFC"/>
+                </a:solidFill>
+                <a:latin typeface="Courier New"/>
+              </a:defRPr>
+            </a:pPr>
+            <a:r>
+              <a:rPr sz="1200" b="0">
+                <a:solidFill>
+                  <a:srgbClr val="F8FAFC"/>
+                </a:solidFill>
+                <a:latin typeface="Courier New"/>
+              </a:rPr>
+              <a:t> </a:t>
+            </a:r>
+          </a:p>
+          <a:p>
+            <a:pPr>
+              <a:defRPr sz="1200" b="0">
+                <a:solidFill>
+                  <a:srgbClr val="F8FAFC"/>
+                </a:solidFill>
+                <a:latin typeface="Courier New"/>
+              </a:defRPr>
+            </a:pPr>
+            <a:r>
+              <a:rPr sz="1200" b="0">
+                <a:solidFill>
+                  <a:srgbClr val="F8FAFC"/>
+                </a:solidFill>
+                <a:latin typeface="Courier New"/>
+              </a:rPr>
+              <a:t>print('accuracy:', round(accuracy_score(yte, clf.predict(Xte)), 4))</a:t>
+            </a:r>
+          </a:p>
+          <a:p>
+            <a:pPr>
+              <a:defRPr sz="1200" b="0">
+                <a:solidFill>
+                  <a:srgbClr val="F8FAFC"/>
+                </a:solidFill>
+                <a:latin typeface="Courier New"/>
+              </a:defRPr>
+            </a:pPr>
+            <a:r>
+              <a:rPr sz="1200" b="0">
+                <a:solidFill>
+                  <a:srgbClr val="F8FAFC"/>
+                </a:solidFill>
+                <a:latin typeface="Courier New"/>
+              </a:rPr>
+              <a:t>print('log-loss:', round(log_loss(yte, proba), 4))</a:t>
+            </a:r>
+          </a:p>
+          <a:p>
+            <a:pPr>
+              <a:defRPr sz="1200" b="0">
+                <a:solidFill>
+                  <a:srgbClr val="F8FAFC"/>
+                </a:solidFill>
+                <a:latin typeface="Courier New"/>
+              </a:defRPr>
+            </a:pPr>
+            <a:r>
+              <a:rPr sz="1200" b="0">
+                <a:solidFill>
+                  <a:srgbClr val="F8FAFC"/>
+                </a:solidFill>
+                <a:latin typeface="Courier New"/>
+              </a:rPr>
+              <a:t>print('matriz de confusión:\n', confusion_matrix(yte, clf.predict(Xte)))</a:t>
+            </a:r>
+          </a:p>
+          <a:p>
+            <a:pPr>
+              <a:defRPr sz="1200" b="0">
+                <a:solidFill>
+                  <a:srgbClr val="F8FAFC"/>
+                </a:solidFill>
+                <a:latin typeface="Courier New"/>
+              </a:defRPr>
+            </a:pPr>
+            <a:r>
+              <a:rPr sz="1200" b="0">
+                <a:solidFill>
+                  <a:srgbClr val="F8FAFC"/>
+                </a:solidFill>
+                <a:latin typeface="Courier New"/>
+              </a:rPr>
+              <a:t>coef = clf.named_steps['logisticregression'].coef_[0]</a:t>
+            </a:r>
+          </a:p>
+          <a:p>
+            <a:pPr>
+              <a:defRPr sz="1200" b="0">
+                <a:solidFill>
+                  <a:srgbClr val="F8FAFC"/>
+                </a:solidFill>
+                <a:latin typeface="Courier New"/>
+              </a:defRPr>
+            </a:pPr>
+            <a:r>
+              <a:rPr sz="1200" b="0">
+                <a:solidFill>
+                  <a:srgbClr val="F8FAFC"/>
+                </a:solidFill>
+                <a:latin typeface="Courier New"/>
+              </a:rPr>
+              <a:t>for i in np.argsort(np.abs(coef))[::-1][:5]:</a:t>
+            </a:r>
+          </a:p>
+          <a:p>
+            <a:pPr>
+              <a:defRPr sz="1200" b="0">
+                <a:solidFill>
+                  <a:srgbClr val="F8FAFC"/>
+                </a:solidFill>
+                <a:latin typeface="Courier New"/>
+              </a:defRPr>
+            </a:pPr>
+            <a:r>
+              <a:rPr sz="1200" b="0">
+                <a:solidFill>
+                  <a:srgbClr val="F8FAFC"/>
+                </a:solidFill>
+                <a:latin typeface="Courier New"/>
+              </a:rPr>
+              <a:t># ... (truncado)</a:t>
             </a:r>
           </a:p>
         </p:txBody>

--- a/classes/parte-1-machine-learning-clasico/075-regresion-logistica-binaria-y-softmax/clase-075-regresion-logistica-binaria-y-softmax-presentacion.pptx
+++ b/classes/parte-1-machine-learning-clasico/075-regresion-logistica-binaria-y-softmax/clase-075-regresion-logistica-binaria-y-softmax-presentacion.pptx
@@ -3272,7 +3272,7 @@
                 </a:solidFill>
                 <a:latin typeface="Segoe UI"/>
               </a:rPr>
-              <a:t>Parte: 1 — Machine Learning Clásico · Fuente: Géron, cap. 4.  Duración estimada: 70 min.</a:t>
+              <a:t>Parte: 1 — Machine Learning Clásico · Fuente: Géron, cap. 4.  Duración estimada: 70 min. · Nivel: Intermedio</a:t>
             </a:r>
           </a:p>
         </p:txBody>
@@ -3581,7 +3581,7 @@
                 </a:solidFill>
                 <a:latin typeface="Segoe UI"/>
               </a:rPr>
-              <a:t>Parte: 1 — Machine Learning Clásico · Fuente: Géron, cap. 4.  Duración estimada: 70 min.</a:t>
+              <a:t>Parte: 1 — Machine Learning Clásico · Fuente: Géron, cap. 4.  Duración estimada: 70 min. · Nivel: Intermedio</a:t>
             </a:r>
           </a:p>
         </p:txBody>
